--- a/07-practice-deploy/slides/07-practice-deploy.pptx
+++ b/07-practice-deploy/slides/07-practice-deploy.pptx
@@ -1433,7 +1433,7 @@
         <p:spPr>
           <a:xfrm>
             <a:off x="107504" y="1268760"/>
-            <a:ext cx="8892480" cy="707886"/>
+            <a:ext cx="2520280" cy="707886"/>
           </a:xfrm>
           <a:prstGeom prst="rect">
             <a:avLst/>
@@ -1448,13 +1448,200 @@
           <a:p>
             <a:pPr algn="ctr"/>
             <a:r>
-              <a:rPr lang="ja-JP" altLang="en-US" sz="4000" dirty="0">
+              <a:rPr lang="ja-JP" altLang="en-US" sz="4000">
                 <a:solidFill>
                   <a:srgbClr val="011893"/>
                 </a:solidFill>
               </a:rPr>
               <a:t>演習：</a:t>
             </a:r>
+            <a:endParaRPr lang="en-US" altLang="ja-JP" sz="4000" dirty="0">
+              <a:solidFill>
+                <a:srgbClr val="011893"/>
+              </a:solidFill>
+            </a:endParaRPr>
+          </a:p>
+        </p:txBody>
+      </p:sp>
+      <p:sp>
+        <p:nvSpPr>
+          <p:cNvPr id="5" name="テキスト ボックス 4">
+            <a:extLst>
+              <a:ext uri="{FF2B5EF4-FFF2-40B4-BE49-F238E27FC236}">
+                <a16:creationId xmlns:a16="http://schemas.microsoft.com/office/drawing/2014/main" id="{DF6FF3F0-B80E-4A32-A410-E1A4C3A7A116}"/>
+              </a:ext>
+            </a:extLst>
+          </p:cNvPr>
+          <p:cNvSpPr txBox="1"/>
+          <p:nvPr/>
+        </p:nvSpPr>
+        <p:spPr>
+          <a:xfrm>
+            <a:off x="3704546" y="5314568"/>
+            <a:ext cx="5416868" cy="461665"/>
+          </a:xfrm>
+          <a:prstGeom prst="rect">
+            <a:avLst/>
+          </a:prstGeom>
+          <a:noFill/>
+        </p:spPr>
+        <p:txBody>
+          <a:bodyPr wrap="none" rtlCol="0">
+            <a:spAutoFit/>
+          </a:bodyPr>
+          <a:lstStyle/>
+          <a:p>
+            <a:r>
+              <a:rPr lang="ja-JP" altLang="en-US" sz="2400" dirty="0"/>
+              <a:t>慶應義塾大学理工学部物理情報工学科</a:t>
+            </a:r>
+            <a:endParaRPr lang="en-US" altLang="ja-JP" sz="2400" dirty="0"/>
+          </a:p>
+        </p:txBody>
+      </p:sp>
+      <p:sp>
+        <p:nvSpPr>
+          <p:cNvPr id="6" name="テキスト ボックス 5">
+            <a:extLst>
+              <a:ext uri="{FF2B5EF4-FFF2-40B4-BE49-F238E27FC236}">
+                <a16:creationId xmlns:a16="http://schemas.microsoft.com/office/drawing/2014/main" id="{94A82E08-1852-476D-B582-C7C001BDD60A}"/>
+              </a:ext>
+            </a:extLst>
+          </p:cNvPr>
+          <p:cNvSpPr txBox="1"/>
+          <p:nvPr/>
+        </p:nvSpPr>
+        <p:spPr>
+          <a:xfrm>
+            <a:off x="8249826" y="5733256"/>
+            <a:ext cx="800219" cy="461665"/>
+          </a:xfrm>
+          <a:prstGeom prst="rect">
+            <a:avLst/>
+          </a:prstGeom>
+          <a:noFill/>
+        </p:spPr>
+        <p:txBody>
+          <a:bodyPr wrap="none" rtlCol="0">
+            <a:spAutoFit/>
+          </a:bodyPr>
+          <a:lstStyle/>
+          <a:p>
+            <a:r>
+              <a:rPr lang="ja-JP" altLang="en-US" sz="2400" dirty="0"/>
+              <a:t>渡辺</a:t>
+            </a:r>
+            <a:endParaRPr lang="en-US" altLang="ja-JP" sz="2400" dirty="0"/>
+          </a:p>
+        </p:txBody>
+      </p:sp>
+      <p:sp>
+        <p:nvSpPr>
+          <p:cNvPr id="2" name="テキスト ボックス 1">
+            <a:extLst>
+              <a:ext uri="{FF2B5EF4-FFF2-40B4-BE49-F238E27FC236}">
+                <a16:creationId xmlns:a16="http://schemas.microsoft.com/office/drawing/2014/main" id="{4E763473-CD81-93DF-6493-B702F532428C}"/>
+              </a:ext>
+            </a:extLst>
+          </p:cNvPr>
+          <p:cNvSpPr txBox="1"/>
+          <p:nvPr/>
+        </p:nvSpPr>
+        <p:spPr>
+          <a:xfrm>
+            <a:off x="0" y="6453336"/>
+            <a:ext cx="7263527" cy="338554"/>
+          </a:xfrm>
+          <a:prstGeom prst="rect">
+            <a:avLst/>
+          </a:prstGeom>
+          <a:noFill/>
+        </p:spPr>
+        <p:txBody>
+          <a:bodyPr wrap="none" rtlCol="0">
+            <a:spAutoFit/>
+          </a:bodyPr>
+          <a:lstStyle/>
+          <a:p>
+            <a:r>
+              <a:rPr kumimoji="1" lang="en-US" altLang="ja-JP" sz="1600" dirty="0"/>
+              <a:t>2026</a:t>
+            </a:r>
+            <a:r>
+              <a:rPr kumimoji="1" lang="ja-JP" altLang="en-US" sz="1600"/>
+              <a:t>年</a:t>
+            </a:r>
+            <a:r>
+              <a:rPr kumimoji="1" lang="en-US" altLang="ja-JP" sz="1600" dirty="0"/>
+              <a:t>3</a:t>
+            </a:r>
+            <a:r>
+              <a:rPr kumimoji="1" lang="ja-JP" altLang="en-US" sz="1600"/>
+              <a:t>月</a:t>
+            </a:r>
+            <a:r>
+              <a:rPr kumimoji="1" lang="en-US" altLang="ja-JP" sz="1600" dirty="0"/>
+              <a:t>9</a:t>
+            </a:r>
+            <a:r>
+              <a:rPr kumimoji="1" lang="ja-JP" altLang="en-US" sz="1600"/>
+              <a:t>日</a:t>
+            </a:r>
+            <a:r>
+              <a:rPr kumimoji="1" lang="en-US" altLang="ja-JP" sz="1600" dirty="0"/>
+              <a:t> </a:t>
+            </a:r>
+            <a:r>
+              <a:rPr kumimoji="1" lang="ja-JP" altLang="en-US" sz="1600"/>
+              <a:t>計算物理春の学校</a:t>
+            </a:r>
+            <a:r>
+              <a:rPr kumimoji="1" lang="en-US" altLang="ja-JP" sz="1600" dirty="0"/>
+              <a:t>2026</a:t>
+            </a:r>
+            <a:r>
+              <a:rPr kumimoji="1" lang="ja-JP" altLang="en-US" sz="1600"/>
+              <a:t>「計算物理屋のための</a:t>
+            </a:r>
+            <a:r>
+              <a:rPr kumimoji="1" lang="en-US" altLang="ja-JP" sz="1600" dirty="0"/>
+              <a:t>Git/GitHub</a:t>
+            </a:r>
+            <a:r>
+              <a:rPr kumimoji="1" lang="ja-JP" altLang="en-US" sz="1600"/>
+              <a:t>入門」</a:t>
+            </a:r>
+          </a:p>
+        </p:txBody>
+      </p:sp>
+      <p:sp>
+        <p:nvSpPr>
+          <p:cNvPr id="4" name="テキスト ボックス 3">
+            <a:extLst>
+              <a:ext uri="{FF2B5EF4-FFF2-40B4-BE49-F238E27FC236}">
+                <a16:creationId xmlns:a16="http://schemas.microsoft.com/office/drawing/2014/main" id="{B18FE1E1-6EE8-094D-2F27-73C9A324C905}"/>
+              </a:ext>
+            </a:extLst>
+          </p:cNvPr>
+          <p:cNvSpPr txBox="1"/>
+          <p:nvPr/>
+        </p:nvSpPr>
+        <p:spPr>
+          <a:xfrm>
+            <a:off x="467544" y="1947658"/>
+            <a:ext cx="8352928" cy="1323439"/>
+          </a:xfrm>
+          <a:prstGeom prst="rect">
+            <a:avLst/>
+          </a:prstGeom>
+          <a:noFill/>
+        </p:spPr>
+        <p:txBody>
+          <a:bodyPr wrap="square" rtlCol="0">
+            <a:spAutoFit/>
+          </a:bodyPr>
+          <a:lstStyle/>
+          <a:p>
             <a:r>
               <a:rPr lang="en-US" altLang="ja-JP" sz="4000" dirty="0">
                 <a:solidFill>
@@ -1464,201 +1651,33 @@
               <a:t>GitHub</a:t>
             </a:r>
             <a:r>
-              <a:rPr lang="ja-JP" altLang="en-US" sz="4000" dirty="0">
-                <a:solidFill>
-                  <a:srgbClr val="011893"/>
-                </a:solidFill>
-              </a:rPr>
-              <a:t>の</a:t>
-            </a:r>
-            <a:r>
               <a:rPr lang="ja-JP" altLang="en-US" sz="4000">
                 <a:solidFill>
                   <a:srgbClr val="011893"/>
                 </a:solidFill>
               </a:rPr>
-              <a:t>操作</a:t>
-            </a:r>
-            <a:r>
-              <a:rPr lang="en-US" altLang="ja-JP" sz="4000">
-                <a:solidFill>
-                  <a:srgbClr val="011893"/>
-                </a:solidFill>
-              </a:rPr>
-              <a:t>(</a:t>
-            </a:r>
+              <a:t>による</a:t>
+            </a:r>
+            <a:endParaRPr lang="en-US" altLang="ja-JP" sz="4000" dirty="0">
+              <a:solidFill>
+                <a:srgbClr val="011893"/>
+              </a:solidFill>
+            </a:endParaRPr>
+          </a:p>
+          <a:p>
             <a:r>
               <a:rPr lang="ja-JP" altLang="en-US" sz="4000">
                 <a:solidFill>
                   <a:srgbClr val="011893"/>
                 </a:solidFill>
               </a:rPr>
-              <a:t>応用編</a:t>
-            </a:r>
-            <a:r>
-              <a:rPr lang="en-US" altLang="ja-JP" sz="4000">
-                <a:solidFill>
-                  <a:srgbClr val="011893"/>
-                </a:solidFill>
-              </a:rPr>
-              <a:t>)</a:t>
+              <a:t>ウェブアプリケーションのデプロイ</a:t>
             </a:r>
             <a:endParaRPr lang="en-US" altLang="ja-JP" sz="4000" dirty="0">
               <a:solidFill>
                 <a:srgbClr val="011893"/>
               </a:solidFill>
             </a:endParaRPr>
-          </a:p>
-        </p:txBody>
-      </p:sp>
-      <p:sp>
-        <p:nvSpPr>
-          <p:cNvPr id="5" name="テキスト ボックス 4">
-            <a:extLst>
-              <a:ext uri="{FF2B5EF4-FFF2-40B4-BE49-F238E27FC236}">
-                <a16:creationId xmlns:a16="http://schemas.microsoft.com/office/drawing/2014/main" id="{DF6FF3F0-B80E-4A32-A410-E1A4C3A7A116}"/>
-              </a:ext>
-            </a:extLst>
-          </p:cNvPr>
-          <p:cNvSpPr txBox="1"/>
-          <p:nvPr/>
-        </p:nvSpPr>
-        <p:spPr>
-          <a:xfrm>
-            <a:off x="3704546" y="5314568"/>
-            <a:ext cx="5416868" cy="461665"/>
-          </a:xfrm>
-          <a:prstGeom prst="rect">
-            <a:avLst/>
-          </a:prstGeom>
-          <a:noFill/>
-        </p:spPr>
-        <p:txBody>
-          <a:bodyPr wrap="none" rtlCol="0">
-            <a:spAutoFit/>
-          </a:bodyPr>
-          <a:lstStyle/>
-          <a:p>
-            <a:r>
-              <a:rPr lang="ja-JP" altLang="en-US" sz="2400" dirty="0"/>
-              <a:t>慶應義塾大学理工学部物理情報工学科</a:t>
-            </a:r>
-            <a:endParaRPr lang="en-US" altLang="ja-JP" sz="2400" dirty="0"/>
-          </a:p>
-        </p:txBody>
-      </p:sp>
-      <p:sp>
-        <p:nvSpPr>
-          <p:cNvPr id="6" name="テキスト ボックス 5">
-            <a:extLst>
-              <a:ext uri="{FF2B5EF4-FFF2-40B4-BE49-F238E27FC236}">
-                <a16:creationId xmlns:a16="http://schemas.microsoft.com/office/drawing/2014/main" id="{94A82E08-1852-476D-B582-C7C001BDD60A}"/>
-              </a:ext>
-            </a:extLst>
-          </p:cNvPr>
-          <p:cNvSpPr txBox="1"/>
-          <p:nvPr/>
-        </p:nvSpPr>
-        <p:spPr>
-          <a:xfrm>
-            <a:off x="8249826" y="5733256"/>
-            <a:ext cx="800219" cy="461665"/>
-          </a:xfrm>
-          <a:prstGeom prst="rect">
-            <a:avLst/>
-          </a:prstGeom>
-          <a:noFill/>
-        </p:spPr>
-        <p:txBody>
-          <a:bodyPr wrap="none" rtlCol="0">
-            <a:spAutoFit/>
-          </a:bodyPr>
-          <a:lstStyle/>
-          <a:p>
-            <a:r>
-              <a:rPr lang="ja-JP" altLang="en-US" sz="2400" dirty="0"/>
-              <a:t>渡辺</a:t>
-            </a:r>
-            <a:endParaRPr lang="en-US" altLang="ja-JP" sz="2400" dirty="0"/>
-          </a:p>
-        </p:txBody>
-      </p:sp>
-      <p:sp>
-        <p:nvSpPr>
-          <p:cNvPr id="2" name="テキスト ボックス 1">
-            <a:extLst>
-              <a:ext uri="{FF2B5EF4-FFF2-40B4-BE49-F238E27FC236}">
-                <a16:creationId xmlns:a16="http://schemas.microsoft.com/office/drawing/2014/main" id="{4E763473-CD81-93DF-6493-B702F532428C}"/>
-              </a:ext>
-            </a:extLst>
-          </p:cNvPr>
-          <p:cNvSpPr txBox="1"/>
-          <p:nvPr/>
-        </p:nvSpPr>
-        <p:spPr>
-          <a:xfrm>
-            <a:off x="0" y="6453336"/>
-            <a:ext cx="7263527" cy="338554"/>
-          </a:xfrm>
-          <a:prstGeom prst="rect">
-            <a:avLst/>
-          </a:prstGeom>
-          <a:noFill/>
-        </p:spPr>
-        <p:txBody>
-          <a:bodyPr wrap="none" rtlCol="0">
-            <a:spAutoFit/>
-          </a:bodyPr>
-          <a:lstStyle/>
-          <a:p>
-            <a:r>
-              <a:rPr kumimoji="1" lang="en-US" altLang="ja-JP" sz="1600" dirty="0"/>
-              <a:t>2026</a:t>
-            </a:r>
-            <a:r>
-              <a:rPr kumimoji="1" lang="ja-JP" altLang="en-US" sz="1600"/>
-              <a:t>年</a:t>
-            </a:r>
-            <a:r>
-              <a:rPr kumimoji="1" lang="en-US" altLang="ja-JP" sz="1600" dirty="0"/>
-              <a:t>3</a:t>
-            </a:r>
-            <a:r>
-              <a:rPr kumimoji="1" lang="ja-JP" altLang="en-US" sz="1600"/>
-              <a:t>月</a:t>
-            </a:r>
-            <a:r>
-              <a:rPr kumimoji="1" lang="en-US" altLang="ja-JP" sz="1600" dirty="0"/>
-              <a:t>9</a:t>
-            </a:r>
-            <a:r>
-              <a:rPr kumimoji="1" lang="ja-JP" altLang="en-US" sz="1600"/>
-              <a:t>日</a:t>
-            </a:r>
-            <a:r>
-              <a:rPr kumimoji="1" lang="en-US" altLang="ja-JP" sz="1600" dirty="0"/>
-              <a:t> </a:t>
-            </a:r>
-            <a:r>
-              <a:rPr kumimoji="1" lang="ja-JP" altLang="en-US" sz="1600"/>
-              <a:t>計算物理春の学校</a:t>
-            </a:r>
-            <a:r>
-              <a:rPr kumimoji="1" lang="en-US" altLang="ja-JP" sz="1600" dirty="0"/>
-              <a:t>2026</a:t>
-            </a:r>
-            <a:r>
-              <a:rPr kumimoji="1" lang="ja-JP" altLang="en-US" sz="1600"/>
-              <a:t>「計算物理屋のための</a:t>
-            </a:r>
-            <a:r>
-              <a:rPr kumimoji="1" lang="en-US" altLang="ja-JP" sz="1600" dirty="0"/>
-              <a:t>Git/GitHub</a:t>
-            </a:r>
-            <a:r>
-              <a:rPr kumimoji="1" lang="ja-JP" altLang="en-US" sz="1600"/>
-              <a:t>入門」</a:t>
-            </a:r>
           </a:p>
         </p:txBody>
       </p:sp>
